--- a/PresentationAS1_final.pptx
+++ b/PresentationAS1_final.pptx
@@ -6,11 +6,11 @@
   </p:sldMasterIdLst>
   <p:sldIdLst>
     <p:sldId id="256" r:id="rId2"/>
-    <p:sldId id="257" r:id="rId3"/>
-    <p:sldId id="258" r:id="rId4"/>
-    <p:sldId id="259" r:id="rId5"/>
-    <p:sldId id="271" r:id="rId6"/>
-    <p:sldId id="260" r:id="rId7"/>
+    <p:sldId id="274" r:id="rId3"/>
+    <p:sldId id="260" r:id="rId4"/>
+    <p:sldId id="258" r:id="rId5"/>
+    <p:sldId id="259" r:id="rId6"/>
+    <p:sldId id="271" r:id="rId7"/>
     <p:sldId id="261" r:id="rId8"/>
     <p:sldId id="265" r:id="rId9"/>
     <p:sldId id="266" r:id="rId10"/>
@@ -4399,10 +4399,10 @@
           <a:lstStyle/>
           <a:p>
             <a:r>
-              <a:rPr lang="en-US" altLang="zh-CN" dirty="0"/>
+              <a:rPr lang="en-US" altLang="zh-CN" i="1" dirty="0"/>
               <a:t>SVM in Carla</a:t>
             </a:r>
-            <a:endParaRPr lang="zh-CN" altLang="en-US" dirty="0"/>
+            <a:endParaRPr lang="zh-CN" altLang="en-US" i="1" dirty="0"/>
           </a:p>
         </p:txBody>
       </p:sp>
@@ -4685,7 +4685,7 @@
               <a:buNone/>
             </a:pPr>
             <a:r>
-              <a:rPr lang="en-US" sz="4450" dirty="0">
+              <a:rPr lang="en-US" sz="4450" i="1" dirty="0">
                 <a:solidFill>
                   <a:srgbClr val="1D1D1B"/>
                 </a:solidFill>
@@ -4695,7 +4695,7 @@
               </a:rPr>
               <a:t>Results and Next Steps</a:t>
             </a:r>
-            <a:endParaRPr lang="en-US" sz="4450" dirty="0"/>
+            <a:endParaRPr lang="en-US" sz="4450" i="1" dirty="0"/>
           </a:p>
         </p:txBody>
       </p:sp>
@@ -5107,7 +5107,13 @@
   <p:cSld>
     <p:spTree>
       <p:nvGrpSpPr>
-        <p:cNvPr id="1" name=""/>
+        <p:cNvPr id="1" name="">
+          <a:extLst>
+            <a:ext uri="{FF2B5EF4-FFF2-40B4-BE49-F238E27FC236}">
+              <a16:creationId xmlns:a16="http://schemas.microsoft.com/office/drawing/2014/main" id="{D4636758-3DCF-B547-625C-F2DA898C4F39}"/>
+            </a:ext>
+          </a:extLst>
+        </p:cNvPr>
         <p:cNvGrpSpPr/>
         <p:nvPr/>
       </p:nvGrpSpPr>
@@ -5124,7 +5130,7 @@
           <p:cNvPr id="2" name="Text 0">
             <a:extLst>
               <a:ext uri="{FF2B5EF4-FFF2-40B4-BE49-F238E27FC236}">
-                <a16:creationId xmlns:a16="http://schemas.microsoft.com/office/drawing/2014/main" id="{807156CC-67BC-3C0F-5A75-5EE52105487F}"/>
+                <a16:creationId xmlns:a16="http://schemas.microsoft.com/office/drawing/2014/main" id="{FC2E6686-725E-0E28-6DB3-F4B0A48E92E4}"/>
               </a:ext>
             </a:extLst>
           </p:cNvPr>
@@ -5172,7 +5178,7 @@
           <p:cNvPr id="3" name="Text 1">
             <a:extLst>
               <a:ext uri="{FF2B5EF4-FFF2-40B4-BE49-F238E27FC236}">
-                <a16:creationId xmlns:a16="http://schemas.microsoft.com/office/drawing/2014/main" id="{D5A41EEE-3EE5-4C54-BF35-952BAC6B72C9}"/>
+                <a16:creationId xmlns:a16="http://schemas.microsoft.com/office/drawing/2014/main" id="{45AC7708-97DD-275C-0D85-C12CFEE4F1CF}"/>
               </a:ext>
             </a:extLst>
           </p:cNvPr>
@@ -5181,7 +5187,7 @@
         </p:nvSpPr>
         <p:spPr>
           <a:xfrm>
-            <a:off x="262159" y="1906867"/>
+            <a:off x="1633752" y="2877606"/>
             <a:ext cx="5833842" cy="1088708"/>
           </a:xfrm>
           <a:prstGeom prst="rect">
@@ -5194,24 +5200,56 @@
           <a:bodyPr wrap="square" lIns="0" tIns="0" rIns="0" bIns="0" rtlCol="0" anchor="t"/>
           <a:lstStyle/>
           <a:p>
-            <a:pPr marL="0" indent="0" algn="l">
+            <a:pPr marL="285750" indent="-285750" algn="l">
               <a:lnSpc>
                 <a:spcPts val="2850"/>
               </a:lnSpc>
-              <a:buNone/>
+              <a:buFont typeface="Wingdings" panose="05000000000000000000" pitchFamily="2" charset="2"/>
+              <a:buChar char="q"/>
             </a:pPr>
             <a:r>
-              <a:rPr lang="en-US" sz="1750" dirty="0">
-                <a:solidFill>
-                  <a:srgbClr val="61615C"/>
-                </a:solidFill>
-                <a:latin typeface="Tomorrow" pitchFamily="34" charset="0"/>
-                <a:ea typeface="Tomorrow" pitchFamily="34" charset="-122"/>
-                <a:cs typeface="Tomorrow" pitchFamily="34" charset="-120"/>
-              </a:rPr>
-              <a:t>As autonomous driving becomes more widespread, ensuring both safety and intelligence in vehicle behavior is critical. Our goal is to build a system that is:</a:t>
-            </a:r>
-            <a:endParaRPr lang="en-US" sz="1750" dirty="0"/>
+              <a:rPr lang="en-US" sz="1750" dirty="0"/>
+              <a:t>Fewer Accidents</a:t>
+            </a:r>
+          </a:p>
+          <a:p>
+            <a:pPr marL="285750" indent="-285750" algn="l">
+              <a:lnSpc>
+                <a:spcPts val="2850"/>
+              </a:lnSpc>
+              <a:buFont typeface="Wingdings" panose="05000000000000000000" pitchFamily="2" charset="2"/>
+              <a:buChar char="q"/>
+            </a:pPr>
+            <a:r>
+              <a:rPr lang="en-US" sz="1750" dirty="0"/>
+              <a:t>Less Traffic</a:t>
+            </a:r>
+          </a:p>
+          <a:p>
+            <a:pPr marL="285750" indent="-285750" algn="l">
+              <a:lnSpc>
+                <a:spcPts val="2850"/>
+              </a:lnSpc>
+              <a:buFont typeface="Wingdings" panose="05000000000000000000" pitchFamily="2" charset="2"/>
+              <a:buChar char="q"/>
+            </a:pPr>
+            <a:r>
+              <a:rPr lang="en-US" sz="1750" dirty="0"/>
+              <a:t>More comfort</a:t>
+            </a:r>
+          </a:p>
+          <a:p>
+            <a:pPr marL="285750" indent="-285750" algn="l">
+              <a:lnSpc>
+                <a:spcPts val="2850"/>
+              </a:lnSpc>
+              <a:buFont typeface="Wingdings" panose="05000000000000000000" pitchFamily="2" charset="2"/>
+              <a:buChar char="q"/>
+            </a:pPr>
+            <a:r>
+              <a:rPr lang="en-US" sz="1750" dirty="0"/>
+              <a:t>Efficient Transport</a:t>
+            </a:r>
           </a:p>
         </p:txBody>
       </p:sp>
@@ -5220,7 +5258,7 @@
           <p:cNvPr id="4" name="Text 2">
             <a:extLst>
               <a:ext uri="{FF2B5EF4-FFF2-40B4-BE49-F238E27FC236}">
-                <a16:creationId xmlns:a16="http://schemas.microsoft.com/office/drawing/2014/main" id="{6A5F9D32-2055-C016-A7E1-32550EF4C1B1}"/>
+                <a16:creationId xmlns:a16="http://schemas.microsoft.com/office/drawing/2014/main" id="{A6A578F9-B400-60AB-9454-D170023BBBF3}"/>
               </a:ext>
             </a:extLst>
           </p:cNvPr>
@@ -5229,7 +5267,7 @@
         </p:nvSpPr>
         <p:spPr>
           <a:xfrm>
-            <a:off x="262158" y="3199647"/>
+            <a:off x="262158" y="1542816"/>
             <a:ext cx="6244709" cy="725805"/>
           </a:xfrm>
           <a:prstGeom prst="rect">
@@ -5258,18 +5296,7 @@
                 <a:ea typeface="Tomorrow" pitchFamily="34" charset="-122"/>
                 <a:cs typeface="Tomorrow" pitchFamily="34" charset="-120"/>
               </a:rPr>
-              <a:t>Smart in decision-making</a:t>
-            </a:r>
-            <a:r>
-              <a:rPr lang="en-US" sz="1750" dirty="0">
-                <a:solidFill>
-                  <a:srgbClr val="61615C"/>
-                </a:solidFill>
-                <a:latin typeface="Tomorrow" pitchFamily="34" charset="0"/>
-                <a:ea typeface="Tomorrow" pitchFamily="34" charset="-122"/>
-                <a:cs typeface="Tomorrow" pitchFamily="34" charset="-120"/>
-              </a:rPr>
-              <a:t> through machine learning</a:t>
+              <a:t>Smart decisions (ML)</a:t>
             </a:r>
             <a:endParaRPr lang="en-US" sz="1750" dirty="0"/>
           </a:p>
@@ -5280,7 +5307,7 @@
           <p:cNvPr id="5" name="Text 3">
             <a:extLst>
               <a:ext uri="{FF2B5EF4-FFF2-40B4-BE49-F238E27FC236}">
-                <a16:creationId xmlns:a16="http://schemas.microsoft.com/office/drawing/2014/main" id="{61BADD9E-0A94-644B-9C0B-637AAC1FDBA2}"/>
+                <a16:creationId xmlns:a16="http://schemas.microsoft.com/office/drawing/2014/main" id="{7EF5456F-CFE6-6357-F25B-6CF7DBDF2A4E}"/>
               </a:ext>
             </a:extLst>
           </p:cNvPr>
@@ -5289,7 +5316,7 @@
         </p:nvSpPr>
         <p:spPr>
           <a:xfrm>
-            <a:off x="262158" y="4004748"/>
+            <a:off x="262158" y="2306562"/>
             <a:ext cx="6244709" cy="362903"/>
           </a:xfrm>
           <a:prstGeom prst="rect">
@@ -5318,55 +5345,7 @@
                 <a:ea typeface="Tomorrow" pitchFamily="34" charset="-122"/>
                 <a:cs typeface="Tomorrow" pitchFamily="34" charset="-120"/>
               </a:rPr>
-              <a:t>Formally verified to avoid unsafe situations</a:t>
-            </a:r>
-            <a:endParaRPr lang="en-US" sz="1750" dirty="0"/>
-          </a:p>
-        </p:txBody>
-      </p:sp>
-      <p:sp>
-        <p:nvSpPr>
-          <p:cNvPr id="6" name="Text 4">
-            <a:extLst>
-              <a:ext uri="{FF2B5EF4-FFF2-40B4-BE49-F238E27FC236}">
-                <a16:creationId xmlns:a16="http://schemas.microsoft.com/office/drawing/2014/main" id="{6431DBEA-EC49-253E-FD55-6793C33A4038}"/>
-              </a:ext>
-            </a:extLst>
-          </p:cNvPr>
-          <p:cNvSpPr/>
-          <p:nvPr/>
-        </p:nvSpPr>
-        <p:spPr>
-          <a:xfrm>
-            <a:off x="262158" y="4571723"/>
-            <a:ext cx="6244709" cy="725805"/>
-          </a:xfrm>
-          <a:prstGeom prst="rect">
-            <a:avLst/>
-          </a:prstGeom>
-          <a:noFill/>
-          <a:ln/>
-        </p:spPr>
-        <p:txBody>
-          <a:bodyPr wrap="square" lIns="0" tIns="0" rIns="0" bIns="0" rtlCol="0" anchor="t"/>
-          <a:lstStyle/>
-          <a:p>
-            <a:pPr marL="0" indent="0" algn="l">
-              <a:lnSpc>
-                <a:spcPts val="2850"/>
-              </a:lnSpc>
-              <a:buNone/>
-            </a:pPr>
-            <a:r>
-              <a:rPr lang="en-US" sz="1750" dirty="0">
-                <a:solidFill>
-                  <a:srgbClr val="61615C"/>
-                </a:solidFill>
-                <a:latin typeface="Tomorrow" pitchFamily="34" charset="0"/>
-                <a:ea typeface="Tomorrow" pitchFamily="34" charset="-122"/>
-                <a:cs typeface="Tomorrow" pitchFamily="34" charset="-120"/>
-              </a:rPr>
-              <a:t>This represents a key step toward safer roads and reliable autonomous vehicle deployment.</a:t>
+              <a:t>Safer behavior (Formal verification)</a:t>
             </a:r>
             <a:endParaRPr lang="en-US" sz="1750" dirty="0"/>
           </a:p>
@@ -5377,7 +5356,7 @@
           <p:cNvPr id="7" name="Image 0" descr="preencoded.png">
             <a:extLst>
               <a:ext uri="{FF2B5EF4-FFF2-40B4-BE49-F238E27FC236}">
-                <a16:creationId xmlns:a16="http://schemas.microsoft.com/office/drawing/2014/main" id="{DFC459E3-A970-BF4E-B2BA-61A47785418B}"/>
+                <a16:creationId xmlns:a16="http://schemas.microsoft.com/office/drawing/2014/main" id="{AA0279A7-2AB7-8ED2-382D-6231895DC48B}"/>
               </a:ext>
             </a:extLst>
           </p:cNvPr>
@@ -5394,18 +5373,250 @@
         </p:blipFill>
         <p:spPr>
           <a:xfrm>
-            <a:off x="6355507" y="1906866"/>
-            <a:ext cx="5815558" cy="3390662"/>
+            <a:off x="5698671" y="0"/>
+            <a:ext cx="6493329" cy="6858000"/>
           </a:xfrm>
           <a:prstGeom prst="rect">
             <a:avLst/>
           </a:prstGeom>
         </p:spPr>
       </p:pic>
+      <p:sp>
+        <p:nvSpPr>
+          <p:cNvPr id="8" name="Arrow: Bent 7">
+            <a:extLst>
+              <a:ext uri="{FF2B5EF4-FFF2-40B4-BE49-F238E27FC236}">
+                <a16:creationId xmlns:a16="http://schemas.microsoft.com/office/drawing/2014/main" id="{51F66356-D292-D587-378E-7192488EB321}"/>
+              </a:ext>
+            </a:extLst>
+          </p:cNvPr>
+          <p:cNvSpPr/>
+          <p:nvPr/>
+        </p:nvSpPr>
+        <p:spPr>
+          <a:xfrm flipV="1">
+            <a:off x="947060" y="2906473"/>
+            <a:ext cx="473529" cy="359228"/>
+          </a:xfrm>
+          <a:prstGeom prst="bentArrow">
+            <a:avLst/>
+          </a:prstGeom>
+        </p:spPr>
+        <p:style>
+          <a:lnRef idx="2">
+            <a:schemeClr val="dk1">
+              <a:shade val="15000"/>
+            </a:schemeClr>
+          </a:lnRef>
+          <a:fillRef idx="1">
+            <a:schemeClr val="dk1"/>
+          </a:fillRef>
+          <a:effectRef idx="0">
+            <a:schemeClr val="dk1"/>
+          </a:effectRef>
+          <a:fontRef idx="minor">
+            <a:schemeClr val="lt1"/>
+          </a:fontRef>
+        </p:style>
+        <p:txBody>
+          <a:bodyPr rtlCol="0" anchor="ctr"/>
+          <a:lstStyle/>
+          <a:p>
+            <a:pPr algn="ctr"/>
+            <a:endParaRPr lang="en-US">
+              <a:solidFill>
+                <a:schemeClr val="tx1"/>
+              </a:solidFill>
+            </a:endParaRPr>
+          </a:p>
+        </p:txBody>
+      </p:sp>
+      <p:sp>
+        <p:nvSpPr>
+          <p:cNvPr id="9" name="TextBox 8">
+            <a:extLst>
+              <a:ext uri="{FF2B5EF4-FFF2-40B4-BE49-F238E27FC236}">
+                <a16:creationId xmlns:a16="http://schemas.microsoft.com/office/drawing/2014/main" id="{666DDF25-A73E-B451-6608-7455C59FC509}"/>
+              </a:ext>
+            </a:extLst>
+          </p:cNvPr>
+          <p:cNvSpPr txBox="1"/>
+          <p:nvPr/>
+        </p:nvSpPr>
+        <p:spPr>
+          <a:xfrm>
+            <a:off x="391886" y="5297528"/>
+            <a:ext cx="5306785" cy="923330"/>
+          </a:xfrm>
+          <a:prstGeom prst="rect">
+            <a:avLst/>
+          </a:prstGeom>
+          <a:noFill/>
+        </p:spPr>
+        <p:txBody>
+          <a:bodyPr wrap="square" rtlCol="0">
+            <a:spAutoFit/>
+          </a:bodyPr>
+          <a:lstStyle/>
+          <a:p>
+            <a:r>
+              <a:rPr lang="en-US" dirty="0"/>
+              <a:t>Big companies (like Tesla, Google, Mercedes-Benz, </a:t>
+            </a:r>
+            <a:r>
+              <a:rPr lang="en-US" dirty="0" err="1"/>
+              <a:t>Bmw</a:t>
+            </a:r>
+            <a:r>
+              <a:rPr lang="en-US" dirty="0"/>
+              <a:t>) are all investing in this, because they know </a:t>
+            </a:r>
+            <a:r>
+              <a:rPr lang="en-US" b="1" dirty="0"/>
+              <a:t>this is the future</a:t>
+            </a:r>
+            <a:r>
+              <a:rPr lang="en-US" dirty="0"/>
+              <a:t>.</a:t>
+            </a:r>
+          </a:p>
+        </p:txBody>
+      </p:sp>
+      <p:sp>
+        <p:nvSpPr>
+          <p:cNvPr id="12" name="Plus Sign 11">
+            <a:extLst>
+              <a:ext uri="{FF2B5EF4-FFF2-40B4-BE49-F238E27FC236}">
+                <a16:creationId xmlns:a16="http://schemas.microsoft.com/office/drawing/2014/main" id="{C5ADE008-CA2F-1A0C-C35E-FEE5C8F94F68}"/>
+              </a:ext>
+            </a:extLst>
+          </p:cNvPr>
+          <p:cNvSpPr/>
+          <p:nvPr/>
+        </p:nvSpPr>
+        <p:spPr>
+          <a:xfrm>
+            <a:off x="1307185" y="1943097"/>
+            <a:ext cx="341997" cy="362903"/>
+          </a:xfrm>
+          <a:prstGeom prst="mathPlus">
+            <a:avLst/>
+          </a:prstGeom>
+        </p:spPr>
+        <p:style>
+          <a:lnRef idx="2">
+            <a:schemeClr val="dk1">
+              <a:shade val="15000"/>
+            </a:schemeClr>
+          </a:lnRef>
+          <a:fillRef idx="1">
+            <a:schemeClr val="dk1"/>
+          </a:fillRef>
+          <a:effectRef idx="0">
+            <a:schemeClr val="dk1"/>
+          </a:effectRef>
+          <a:fontRef idx="minor">
+            <a:schemeClr val="lt1"/>
+          </a:fontRef>
+        </p:style>
+        <p:txBody>
+          <a:bodyPr rtlCol="0" anchor="ctr"/>
+          <a:lstStyle/>
+          <a:p>
+            <a:pPr algn="ctr"/>
+            <a:endParaRPr lang="en-US"/>
+          </a:p>
+        </p:txBody>
+      </p:sp>
+      <p:sp>
+        <p:nvSpPr>
+          <p:cNvPr id="15" name="Equals 14">
+            <a:extLst>
+              <a:ext uri="{FF2B5EF4-FFF2-40B4-BE49-F238E27FC236}">
+                <a16:creationId xmlns:a16="http://schemas.microsoft.com/office/drawing/2014/main" id="{5B5EAEE4-C262-DC78-D9D1-395997DBB783}"/>
+              </a:ext>
+            </a:extLst>
+          </p:cNvPr>
+          <p:cNvSpPr/>
+          <p:nvPr/>
+        </p:nvSpPr>
+        <p:spPr>
+          <a:xfrm>
+            <a:off x="2107291" y="4577385"/>
+            <a:ext cx="374652" cy="319855"/>
+          </a:xfrm>
+          <a:prstGeom prst="mathEqual">
+            <a:avLst/>
+          </a:prstGeom>
+        </p:spPr>
+        <p:style>
+          <a:lnRef idx="2">
+            <a:schemeClr val="dk1">
+              <a:shade val="15000"/>
+            </a:schemeClr>
+          </a:lnRef>
+          <a:fillRef idx="1">
+            <a:schemeClr val="dk1"/>
+          </a:fillRef>
+          <a:effectRef idx="0">
+            <a:schemeClr val="dk1"/>
+          </a:effectRef>
+          <a:fontRef idx="minor">
+            <a:schemeClr val="lt1"/>
+          </a:fontRef>
+        </p:style>
+        <p:txBody>
+          <a:bodyPr rtlCol="0" anchor="ctr"/>
+          <a:lstStyle/>
+          <a:p>
+            <a:pPr algn="ctr"/>
+            <a:endParaRPr lang="en-US">
+              <a:solidFill>
+                <a:schemeClr val="tx1"/>
+              </a:solidFill>
+            </a:endParaRPr>
+          </a:p>
+        </p:txBody>
+      </p:sp>
+      <p:sp>
+        <p:nvSpPr>
+          <p:cNvPr id="16" name="TextBox 15">
+            <a:extLst>
+              <a:ext uri="{FF2B5EF4-FFF2-40B4-BE49-F238E27FC236}">
+                <a16:creationId xmlns:a16="http://schemas.microsoft.com/office/drawing/2014/main" id="{BC6B2E38-8796-36D4-E9FA-C5540C85BD36}"/>
+              </a:ext>
+            </a:extLst>
+          </p:cNvPr>
+          <p:cNvSpPr txBox="1"/>
+          <p:nvPr/>
+        </p:nvSpPr>
+        <p:spPr>
+          <a:xfrm>
+            <a:off x="2596243" y="4463082"/>
+            <a:ext cx="2318657" cy="646331"/>
+          </a:xfrm>
+          <a:prstGeom prst="rect">
+            <a:avLst/>
+          </a:prstGeom>
+          <a:noFill/>
+        </p:spPr>
+        <p:txBody>
+          <a:bodyPr wrap="square" rtlCol="0">
+            <a:spAutoFit/>
+          </a:bodyPr>
+          <a:lstStyle/>
+          <a:p>
+            <a:r>
+              <a:rPr lang="en-US" b="1" dirty="0"/>
+              <a:t>Better Autonomous System</a:t>
+            </a:r>
+          </a:p>
+        </p:txBody>
+      </p:sp>
     </p:spTree>
     <p:extLst>
       <p:ext uri="{BB962C8B-B14F-4D97-AF65-F5344CB8AC3E}">
-        <p14:creationId xmlns:p14="http://schemas.microsoft.com/office/powerpoint/2010/main" val="2010107032"/>
+        <p14:creationId xmlns:p14="http://schemas.microsoft.com/office/powerpoint/2010/main" val="435500686"/>
       </p:ext>
     </p:extLst>
   </p:cSld>
@@ -5432,515 +5643,40 @@
           <a:chExt cx="0" cy="0"/>
         </a:xfrm>
       </p:grpSpPr>
-      <p:sp>
-        <p:nvSpPr>
-          <p:cNvPr id="2" name="Text 0">
-            <a:extLst>
-              <a:ext uri="{FF2B5EF4-FFF2-40B4-BE49-F238E27FC236}">
-                <a16:creationId xmlns:a16="http://schemas.microsoft.com/office/drawing/2014/main" id="{7C8C01D5-FC93-3BFE-B46F-35DD476747DB}"/>
-              </a:ext>
-            </a:extLst>
-          </p:cNvPr>
-          <p:cNvSpPr/>
-          <p:nvPr/>
-        </p:nvSpPr>
-        <p:spPr>
-          <a:xfrm>
-            <a:off x="4961756" y="86263"/>
-            <a:ext cx="7194987" cy="1274551"/>
-          </a:xfrm>
-          <a:prstGeom prst="rect">
-            <a:avLst/>
-          </a:prstGeom>
-          <a:noFill/>
-          <a:ln/>
-        </p:spPr>
-        <p:txBody>
-          <a:bodyPr wrap="square" lIns="0" tIns="0" rIns="0" bIns="0" rtlCol="0" anchor="t"/>
-          <a:lstStyle/>
-          <a:p>
-            <a:pPr marL="0" indent="0" algn="l">
-              <a:lnSpc>
-                <a:spcPts val="5550"/>
-              </a:lnSpc>
-              <a:buNone/>
-            </a:pPr>
-            <a:r>
-              <a:rPr lang="en-US" sz="4450" b="1" i="1" dirty="0">
-                <a:solidFill>
-                  <a:srgbClr val="1D1D1B"/>
-                </a:solidFill>
-                <a:latin typeface="Tomorrow Semi Bold" pitchFamily="34" charset="0"/>
-                <a:ea typeface="Tomorrow Semi Bold" pitchFamily="34" charset="-122"/>
-                <a:cs typeface="Tomorrow Semi Bold" pitchFamily="34" charset="-120"/>
-              </a:rPr>
-              <a:t>UPPAAL Model for Truck Platooning</a:t>
-            </a:r>
-            <a:endParaRPr lang="en-US" sz="4450" b="1" i="1" dirty="0"/>
-          </a:p>
-        </p:txBody>
-      </p:sp>
-      <p:sp>
-        <p:nvSpPr>
-          <p:cNvPr id="3" name="Shape 1">
-            <a:extLst>
-              <a:ext uri="{FF2B5EF4-FFF2-40B4-BE49-F238E27FC236}">
-                <a16:creationId xmlns:a16="http://schemas.microsoft.com/office/drawing/2014/main" id="{083CE206-2999-3B20-AFB9-8E5B48047164}"/>
-              </a:ext>
-            </a:extLst>
-          </p:cNvPr>
-          <p:cNvSpPr/>
-          <p:nvPr/>
-        </p:nvSpPr>
-        <p:spPr>
-          <a:xfrm>
-            <a:off x="4961756" y="1843982"/>
-            <a:ext cx="485894" cy="458821"/>
-          </a:xfrm>
-          <a:prstGeom prst="roundRect">
-            <a:avLst>
-              <a:gd name="adj" fmla="val 6667"/>
-            </a:avLst>
-          </a:prstGeom>
-          <a:solidFill>
-            <a:srgbClr val="F0EAEA"/>
-          </a:solidFill>
-          <a:ln/>
-        </p:spPr>
-        <p:txBody>
-          <a:bodyPr/>
-          <a:lstStyle/>
-          <a:p>
-            <a:endParaRPr lang="zh-CN" altLang="en-US"/>
-          </a:p>
-        </p:txBody>
-      </p:sp>
-      <p:sp>
-        <p:nvSpPr>
-          <p:cNvPr id="4" name="Text 2">
-            <a:extLst>
-              <a:ext uri="{FF2B5EF4-FFF2-40B4-BE49-F238E27FC236}">
-                <a16:creationId xmlns:a16="http://schemas.microsoft.com/office/drawing/2014/main" id="{DCE919A4-66DB-2F2D-3C32-E2875A5822BF}"/>
-              </a:ext>
-            </a:extLst>
-          </p:cNvPr>
-          <p:cNvSpPr/>
-          <p:nvPr/>
-        </p:nvSpPr>
-        <p:spPr>
-          <a:xfrm>
-            <a:off x="5698872" y="1921849"/>
-            <a:ext cx="3165563" cy="318584"/>
-          </a:xfrm>
-          <a:prstGeom prst="rect">
-            <a:avLst/>
-          </a:prstGeom>
-          <a:noFill/>
-          <a:ln/>
-        </p:spPr>
-        <p:txBody>
-          <a:bodyPr wrap="none" lIns="0" tIns="0" rIns="0" bIns="0" rtlCol="0" anchor="t"/>
-          <a:lstStyle/>
-          <a:p>
-            <a:pPr marL="0" indent="0" algn="l">
-              <a:lnSpc>
-                <a:spcPts val="2750"/>
-              </a:lnSpc>
-              <a:buNone/>
-            </a:pPr>
-            <a:r>
-              <a:rPr lang="en-US" sz="2200" b="1" i="1" dirty="0">
-                <a:latin typeface="Tomorrow Semi Bold" pitchFamily="34" charset="0"/>
-                <a:ea typeface="Tomorrow Semi Bold" pitchFamily="34" charset="-122"/>
-                <a:cs typeface="Tomorrow Semi Bold" pitchFamily="34" charset="-120"/>
-              </a:rPr>
-              <a:t>Timed Automata Model</a:t>
-            </a:r>
-            <a:endParaRPr lang="en-US" sz="2200" b="1" i="1" dirty="0"/>
-          </a:p>
-        </p:txBody>
-      </p:sp>
-      <p:sp>
-        <p:nvSpPr>
-          <p:cNvPr id="5" name="Text 3">
-            <a:extLst>
-              <a:ext uri="{FF2B5EF4-FFF2-40B4-BE49-F238E27FC236}">
-                <a16:creationId xmlns:a16="http://schemas.microsoft.com/office/drawing/2014/main" id="{51CD2031-839F-70E4-4F1F-00AA904BA9BD}"/>
-              </a:ext>
-            </a:extLst>
-          </p:cNvPr>
-          <p:cNvSpPr/>
-          <p:nvPr/>
-        </p:nvSpPr>
-        <p:spPr>
-          <a:xfrm>
-            <a:off x="5698873" y="2412269"/>
-            <a:ext cx="6493128" cy="652584"/>
-          </a:xfrm>
-          <a:prstGeom prst="rect">
-            <a:avLst/>
-          </a:prstGeom>
-          <a:noFill/>
-          <a:ln/>
-        </p:spPr>
-        <p:txBody>
-          <a:bodyPr wrap="square" lIns="0" tIns="0" rIns="0" bIns="0" rtlCol="0" anchor="t"/>
-          <a:lstStyle/>
-          <a:p>
-            <a:pPr marL="0" indent="0" algn="l">
-              <a:lnSpc>
-                <a:spcPts val="2850"/>
-              </a:lnSpc>
-              <a:buNone/>
-            </a:pPr>
-            <a:r>
-              <a:rPr lang="en-US" sz="1750" dirty="0">
-                <a:solidFill>
-                  <a:srgbClr val="61615C"/>
-                </a:solidFill>
-                <a:latin typeface="Tomorrow" pitchFamily="34" charset="0"/>
-                <a:ea typeface="Tomorrow" pitchFamily="34" charset="-122"/>
-                <a:cs typeface="Tomorrow" pitchFamily="34" charset="-120"/>
-              </a:rPr>
-              <a:t>Created using UPPAAL to formally verify autonomous truck platooning behavior</a:t>
-            </a:r>
-            <a:endParaRPr lang="en-US" sz="1750" dirty="0"/>
-          </a:p>
-        </p:txBody>
-      </p:sp>
-      <p:sp>
-        <p:nvSpPr>
-          <p:cNvPr id="6" name="Shape 4">
-            <a:extLst>
-              <a:ext uri="{FF2B5EF4-FFF2-40B4-BE49-F238E27FC236}">
-                <a16:creationId xmlns:a16="http://schemas.microsoft.com/office/drawing/2014/main" id="{4D33835B-FBCE-E0C3-81A0-B95C2EFC0332}"/>
-              </a:ext>
-            </a:extLst>
-          </p:cNvPr>
-          <p:cNvSpPr/>
-          <p:nvPr/>
-        </p:nvSpPr>
-        <p:spPr>
-          <a:xfrm>
-            <a:off x="4961756" y="3591701"/>
-            <a:ext cx="485894" cy="458821"/>
-          </a:xfrm>
-          <a:prstGeom prst="roundRect">
-            <a:avLst>
-              <a:gd name="adj" fmla="val 6667"/>
-            </a:avLst>
-          </a:prstGeom>
-          <a:solidFill>
-            <a:srgbClr val="F0EAEA"/>
-          </a:solidFill>
-          <a:ln/>
-        </p:spPr>
-        <p:txBody>
-          <a:bodyPr/>
-          <a:lstStyle/>
-          <a:p>
-            <a:endParaRPr lang="zh-CN" altLang="en-US"/>
-          </a:p>
-        </p:txBody>
-      </p:sp>
-      <p:sp>
-        <p:nvSpPr>
-          <p:cNvPr id="7" name="Text 5">
-            <a:extLst>
-              <a:ext uri="{FF2B5EF4-FFF2-40B4-BE49-F238E27FC236}">
-                <a16:creationId xmlns:a16="http://schemas.microsoft.com/office/drawing/2014/main" id="{34E46091-D2CF-B21E-86CB-C91385251CE3}"/>
-              </a:ext>
-            </a:extLst>
-          </p:cNvPr>
-          <p:cNvSpPr/>
-          <p:nvPr/>
-        </p:nvSpPr>
-        <p:spPr>
-          <a:xfrm>
-            <a:off x="5698872" y="3669568"/>
-            <a:ext cx="2958327" cy="318584"/>
-          </a:xfrm>
-          <a:prstGeom prst="rect">
-            <a:avLst/>
-          </a:prstGeom>
-          <a:noFill/>
-          <a:ln/>
-        </p:spPr>
-        <p:txBody>
-          <a:bodyPr wrap="none" lIns="0" tIns="0" rIns="0" bIns="0" rtlCol="0" anchor="t"/>
-          <a:lstStyle/>
-          <a:p>
-            <a:pPr marL="0" indent="0" algn="l">
-              <a:lnSpc>
-                <a:spcPts val="2750"/>
-              </a:lnSpc>
-              <a:buNone/>
-            </a:pPr>
-            <a:r>
-              <a:rPr lang="en-US" sz="2200" b="1" i="1" dirty="0">
-                <a:solidFill>
-                  <a:schemeClr val="tx1">
-                    <a:lumMod val="95000"/>
-                    <a:lumOff val="5000"/>
-                  </a:schemeClr>
-                </a:solidFill>
-                <a:latin typeface="Tomorrow Semi Bold" pitchFamily="34" charset="0"/>
-                <a:ea typeface="Tomorrow Semi Bold" pitchFamily="34" charset="-122"/>
-                <a:cs typeface="Tomorrow Semi Bold" pitchFamily="34" charset="-120"/>
-              </a:rPr>
-              <a:t>Real-World Scenarios</a:t>
-            </a:r>
-            <a:endParaRPr lang="en-US" sz="2200" b="1" i="1" dirty="0">
-              <a:solidFill>
-                <a:schemeClr val="tx1">
-                  <a:lumMod val="95000"/>
-                  <a:lumOff val="5000"/>
-                </a:schemeClr>
-              </a:solidFill>
-            </a:endParaRPr>
-          </a:p>
-        </p:txBody>
-      </p:sp>
-      <p:sp>
-        <p:nvSpPr>
-          <p:cNvPr id="8" name="Text 6">
-            <a:extLst>
-              <a:ext uri="{FF2B5EF4-FFF2-40B4-BE49-F238E27FC236}">
-                <a16:creationId xmlns:a16="http://schemas.microsoft.com/office/drawing/2014/main" id="{E0121EAE-4E53-AD2C-EE14-B9AF4CFF28F7}"/>
-              </a:ext>
-            </a:extLst>
-          </p:cNvPr>
-          <p:cNvSpPr/>
-          <p:nvPr/>
-        </p:nvSpPr>
-        <p:spPr>
-          <a:xfrm>
-            <a:off x="5698873" y="4159987"/>
-            <a:ext cx="6493128" cy="652584"/>
-          </a:xfrm>
-          <a:prstGeom prst="rect">
-            <a:avLst/>
-          </a:prstGeom>
-          <a:noFill/>
-          <a:ln/>
-        </p:spPr>
-        <p:txBody>
-          <a:bodyPr wrap="square" lIns="0" tIns="0" rIns="0" bIns="0" rtlCol="0" anchor="t"/>
-          <a:lstStyle/>
-          <a:p>
-            <a:pPr marL="0" indent="0" algn="l">
-              <a:lnSpc>
-                <a:spcPts val="2850"/>
-              </a:lnSpc>
-              <a:buNone/>
-            </a:pPr>
-            <a:r>
-              <a:rPr lang="en-US" sz="1750" dirty="0">
-                <a:solidFill>
-                  <a:srgbClr val="61615C"/>
-                </a:solidFill>
-                <a:latin typeface="Tomorrow" pitchFamily="34" charset="0"/>
-                <a:ea typeface="Tomorrow" pitchFamily="34" charset="-122"/>
-                <a:cs typeface="Tomorrow" pitchFamily="34" charset="-120"/>
-              </a:rPr>
-              <a:t>Simulates trucks detecting cut-in cars and coordinating to avoid collisions</a:t>
-            </a:r>
-            <a:endParaRPr lang="en-US" sz="1750" dirty="0"/>
-          </a:p>
-        </p:txBody>
-      </p:sp>
-      <p:sp>
-        <p:nvSpPr>
-          <p:cNvPr id="9" name="Shape 7">
-            <a:extLst>
-              <a:ext uri="{FF2B5EF4-FFF2-40B4-BE49-F238E27FC236}">
-                <a16:creationId xmlns:a16="http://schemas.microsoft.com/office/drawing/2014/main" id="{95DC2CDF-CB88-61CB-53BF-0D011F01A68C}"/>
-              </a:ext>
-            </a:extLst>
-          </p:cNvPr>
-          <p:cNvSpPr/>
-          <p:nvPr/>
-        </p:nvSpPr>
-        <p:spPr>
-          <a:xfrm>
-            <a:off x="4961756" y="5339419"/>
-            <a:ext cx="485894" cy="458821"/>
-          </a:xfrm>
-          <a:prstGeom prst="roundRect">
-            <a:avLst>
-              <a:gd name="adj" fmla="val 6667"/>
-            </a:avLst>
-          </a:prstGeom>
-          <a:solidFill>
-            <a:srgbClr val="F0EAEA"/>
-          </a:solidFill>
-          <a:ln/>
-        </p:spPr>
-        <p:txBody>
-          <a:bodyPr/>
-          <a:lstStyle/>
-          <a:p>
-            <a:endParaRPr lang="zh-CN" altLang="en-US"/>
-          </a:p>
-        </p:txBody>
-      </p:sp>
-      <p:sp>
-        <p:nvSpPr>
-          <p:cNvPr id="10" name="Text 8">
-            <a:extLst>
-              <a:ext uri="{FF2B5EF4-FFF2-40B4-BE49-F238E27FC236}">
-                <a16:creationId xmlns:a16="http://schemas.microsoft.com/office/drawing/2014/main" id="{3D844B86-84FD-E93A-534F-C626189A217F}"/>
-              </a:ext>
-            </a:extLst>
-          </p:cNvPr>
-          <p:cNvSpPr/>
-          <p:nvPr/>
-        </p:nvSpPr>
-        <p:spPr>
-          <a:xfrm>
-            <a:off x="5698872" y="5417286"/>
-            <a:ext cx="2914340" cy="318584"/>
-          </a:xfrm>
-          <a:prstGeom prst="rect">
-            <a:avLst/>
-          </a:prstGeom>
-          <a:noFill/>
-          <a:ln/>
-        </p:spPr>
-        <p:txBody>
-          <a:bodyPr wrap="none" lIns="0" tIns="0" rIns="0" bIns="0" rtlCol="0" anchor="t"/>
-          <a:lstStyle/>
-          <a:p>
-            <a:pPr marL="0" indent="0" algn="l">
-              <a:lnSpc>
-                <a:spcPts val="2750"/>
-              </a:lnSpc>
-              <a:buNone/>
-            </a:pPr>
-            <a:r>
-              <a:rPr lang="en-US" sz="2200" b="1" i="1" dirty="0">
-                <a:solidFill>
-                  <a:schemeClr val="tx1">
-                    <a:lumMod val="95000"/>
-                    <a:lumOff val="5000"/>
-                  </a:schemeClr>
-                </a:solidFill>
-                <a:latin typeface="Tomorrow Semi Bold" pitchFamily="34" charset="0"/>
-                <a:ea typeface="Tomorrow Semi Bold" pitchFamily="34" charset="-122"/>
-                <a:cs typeface="Tomorrow Semi Bold" pitchFamily="34" charset="-120"/>
-              </a:rPr>
-              <a:t>Safe Joining Protocol</a:t>
-            </a:r>
-            <a:endParaRPr lang="en-US" sz="2200" b="1" i="1" dirty="0">
-              <a:solidFill>
-                <a:schemeClr val="tx1">
-                  <a:lumMod val="95000"/>
-                  <a:lumOff val="5000"/>
-                </a:schemeClr>
-              </a:solidFill>
-            </a:endParaRPr>
-          </a:p>
-        </p:txBody>
-      </p:sp>
-      <p:sp>
-        <p:nvSpPr>
-          <p:cNvPr id="11" name="Text 9">
-            <a:extLst>
-              <a:ext uri="{FF2B5EF4-FFF2-40B4-BE49-F238E27FC236}">
-                <a16:creationId xmlns:a16="http://schemas.microsoft.com/office/drawing/2014/main" id="{03CCC457-4C09-7391-A7C0-2C58E49A7DD9}"/>
-              </a:ext>
-            </a:extLst>
-          </p:cNvPr>
-          <p:cNvSpPr/>
-          <p:nvPr/>
-        </p:nvSpPr>
-        <p:spPr>
-          <a:xfrm>
-            <a:off x="5698873" y="5907705"/>
-            <a:ext cx="6493128" cy="652584"/>
-          </a:xfrm>
-          <a:prstGeom prst="rect">
-            <a:avLst/>
-          </a:prstGeom>
-          <a:noFill/>
-          <a:ln/>
-        </p:spPr>
-        <p:txBody>
-          <a:bodyPr wrap="square" lIns="0" tIns="0" rIns="0" bIns="0" rtlCol="0" anchor="t"/>
-          <a:lstStyle/>
-          <a:p>
-            <a:pPr marL="0" indent="0" algn="l">
-              <a:lnSpc>
-                <a:spcPts val="2850"/>
-              </a:lnSpc>
-              <a:buNone/>
-            </a:pPr>
-            <a:r>
-              <a:rPr lang="en-US" sz="1750" dirty="0">
-                <a:solidFill>
-                  <a:srgbClr val="61615C"/>
-                </a:solidFill>
-                <a:latin typeface="Tomorrow" pitchFamily="34" charset="0"/>
-                <a:ea typeface="Tomorrow" pitchFamily="34" charset="-122"/>
-                <a:cs typeface="Tomorrow" pitchFamily="34" charset="-120"/>
-              </a:rPr>
-              <a:t>Enables new trucks to safely join an existing platoon through formal verification</a:t>
-            </a:r>
-            <a:endParaRPr lang="en-US" sz="1750" dirty="0"/>
-          </a:p>
-        </p:txBody>
-      </p:sp>
       <p:pic>
         <p:nvPicPr>
-          <p:cNvPr id="2050" name="Picture 2" descr="Identificación Y Verificación Como Parte De La Debida Diligencia Adecuada  De Un Cliente">
-            <a:extLst>
-              <a:ext uri="{FF2B5EF4-FFF2-40B4-BE49-F238E27FC236}">
-                <a16:creationId xmlns:a16="http://schemas.microsoft.com/office/drawing/2014/main" id="{7E0C36F3-CE5E-0B4E-1DC1-D8609DFECFE8}"/>
+          <p:cNvPr id="2" name="Picture 1">
+            <a:extLst>
+              <a:ext uri="{FF2B5EF4-FFF2-40B4-BE49-F238E27FC236}">
+                <a16:creationId xmlns:a16="http://schemas.microsoft.com/office/drawing/2014/main" id="{28AC5B99-A3A2-BB01-3F39-E3CA65EB6422}"/>
               </a:ext>
             </a:extLst>
           </p:cNvPr>
           <p:cNvPicPr>
-            <a:picLocks noChangeAspect="1" noChangeArrowheads="1"/>
+            <a:picLocks noChangeAspect="1"/>
           </p:cNvPicPr>
           <p:nvPr/>
         </p:nvPicPr>
         <p:blipFill>
-          <a:blip r:embed="rId2">
-            <a:extLst>
-              <a:ext uri="{28A0092B-C50C-407E-A947-70E740481C1C}">
-                <a14:useLocalDpi xmlns:a14="http://schemas.microsoft.com/office/drawing/2010/main" val="0"/>
-              </a:ext>
-            </a:extLst>
-          </a:blip>
-          <a:srcRect/>
+          <a:blip r:embed="rId2"/>
           <a:stretch>
             <a:fillRect/>
           </a:stretch>
         </p:blipFill>
-        <p:spPr bwMode="auto">
-          <a:xfrm>
-            <a:off x="0" y="1"/>
-            <a:ext cx="4805916" cy="6858000"/>
+        <p:spPr>
+          <a:xfrm>
+            <a:off x="0" y="1622110"/>
+            <a:ext cx="12192000" cy="2656840"/>
           </a:xfrm>
           <a:prstGeom prst="rect">
             <a:avLst/>
           </a:prstGeom>
-          <a:noFill/>
-          <a:extLst>
-            <a:ext uri="{909E8E84-426E-40DD-AFC4-6F175D3DCCD1}">
-              <a14:hiddenFill xmlns:a14="http://schemas.microsoft.com/office/drawing/2010/main">
-                <a:solidFill>
-                  <a:srgbClr val="FFFFFF"/>
-                </a:solidFill>
-              </a14:hiddenFill>
-            </a:ext>
-          </a:extLst>
         </p:spPr>
       </p:pic>
     </p:spTree>
     <p:extLst>
       <p:ext uri="{BB962C8B-B14F-4D97-AF65-F5344CB8AC3E}">
-        <p14:creationId xmlns:p14="http://schemas.microsoft.com/office/powerpoint/2010/main" val="296643509"/>
+        <p14:creationId xmlns:p14="http://schemas.microsoft.com/office/powerpoint/2010/main" val="4120009200"/>
       </p:ext>
     </p:extLst>
   </p:cSld>
@@ -5972,6 +5708,541 @@
           <p:cNvPr id="2" name="Text 0">
             <a:extLst>
               <a:ext uri="{FF2B5EF4-FFF2-40B4-BE49-F238E27FC236}">
+                <a16:creationId xmlns:a16="http://schemas.microsoft.com/office/drawing/2014/main" id="{7C8C01D5-FC93-3BFE-B46F-35DD476747DB}"/>
+              </a:ext>
+            </a:extLst>
+          </p:cNvPr>
+          <p:cNvSpPr/>
+          <p:nvPr/>
+        </p:nvSpPr>
+        <p:spPr>
+          <a:xfrm>
+            <a:off x="4961756" y="86263"/>
+            <a:ext cx="7194987" cy="1274551"/>
+          </a:xfrm>
+          <a:prstGeom prst="rect">
+            <a:avLst/>
+          </a:prstGeom>
+          <a:noFill/>
+          <a:ln/>
+        </p:spPr>
+        <p:txBody>
+          <a:bodyPr wrap="square" lIns="0" tIns="0" rIns="0" bIns="0" rtlCol="0" anchor="t"/>
+          <a:lstStyle/>
+          <a:p>
+            <a:pPr marL="0" indent="0" algn="l">
+              <a:lnSpc>
+                <a:spcPts val="5550"/>
+              </a:lnSpc>
+              <a:buNone/>
+            </a:pPr>
+            <a:r>
+              <a:rPr lang="en-US" sz="4450" b="1" i="1" dirty="0">
+                <a:solidFill>
+                  <a:srgbClr val="1D1D1B"/>
+                </a:solidFill>
+                <a:latin typeface="Tomorrow Semi Bold" pitchFamily="34" charset="0"/>
+                <a:ea typeface="Tomorrow Semi Bold" pitchFamily="34" charset="-122"/>
+                <a:cs typeface="Tomorrow Semi Bold" pitchFamily="34" charset="-120"/>
+              </a:rPr>
+              <a:t>UPPAAL Model for Truck Platooning</a:t>
+            </a:r>
+            <a:endParaRPr lang="en-US" sz="4450" b="1" i="1" dirty="0"/>
+          </a:p>
+        </p:txBody>
+      </p:sp>
+      <p:sp>
+        <p:nvSpPr>
+          <p:cNvPr id="3" name="Shape 1">
+            <a:extLst>
+              <a:ext uri="{FF2B5EF4-FFF2-40B4-BE49-F238E27FC236}">
+                <a16:creationId xmlns:a16="http://schemas.microsoft.com/office/drawing/2014/main" id="{083CE206-2999-3B20-AFB9-8E5B48047164}"/>
+              </a:ext>
+            </a:extLst>
+          </p:cNvPr>
+          <p:cNvSpPr/>
+          <p:nvPr/>
+        </p:nvSpPr>
+        <p:spPr>
+          <a:xfrm>
+            <a:off x="4961756" y="1843982"/>
+            <a:ext cx="485894" cy="458821"/>
+          </a:xfrm>
+          <a:prstGeom prst="roundRect">
+            <a:avLst>
+              <a:gd name="adj" fmla="val 6667"/>
+            </a:avLst>
+          </a:prstGeom>
+          <a:solidFill>
+            <a:srgbClr val="F0EAEA"/>
+          </a:solidFill>
+          <a:ln/>
+        </p:spPr>
+        <p:txBody>
+          <a:bodyPr/>
+          <a:lstStyle/>
+          <a:p>
+            <a:endParaRPr lang="zh-CN" altLang="en-US"/>
+          </a:p>
+        </p:txBody>
+      </p:sp>
+      <p:sp>
+        <p:nvSpPr>
+          <p:cNvPr id="4" name="Text 2">
+            <a:extLst>
+              <a:ext uri="{FF2B5EF4-FFF2-40B4-BE49-F238E27FC236}">
+                <a16:creationId xmlns:a16="http://schemas.microsoft.com/office/drawing/2014/main" id="{DCE919A4-66DB-2F2D-3C32-E2875A5822BF}"/>
+              </a:ext>
+            </a:extLst>
+          </p:cNvPr>
+          <p:cNvSpPr/>
+          <p:nvPr/>
+        </p:nvSpPr>
+        <p:spPr>
+          <a:xfrm>
+            <a:off x="5698872" y="1921849"/>
+            <a:ext cx="3165563" cy="318584"/>
+          </a:xfrm>
+          <a:prstGeom prst="rect">
+            <a:avLst/>
+          </a:prstGeom>
+          <a:noFill/>
+          <a:ln/>
+        </p:spPr>
+        <p:txBody>
+          <a:bodyPr wrap="none" lIns="0" tIns="0" rIns="0" bIns="0" rtlCol="0" anchor="t"/>
+          <a:lstStyle/>
+          <a:p>
+            <a:pPr marL="0" indent="0" algn="l">
+              <a:lnSpc>
+                <a:spcPts val="2750"/>
+              </a:lnSpc>
+              <a:buNone/>
+            </a:pPr>
+            <a:r>
+              <a:rPr lang="en-US" sz="2200" b="1" i="1" dirty="0">
+                <a:latin typeface="Tomorrow Semi Bold" pitchFamily="34" charset="0"/>
+                <a:ea typeface="Tomorrow Semi Bold" pitchFamily="34" charset="-122"/>
+                <a:cs typeface="Tomorrow Semi Bold" pitchFamily="34" charset="-120"/>
+              </a:rPr>
+              <a:t>Timed Automata Model</a:t>
+            </a:r>
+            <a:endParaRPr lang="en-US" sz="2200" b="1" i="1" dirty="0"/>
+          </a:p>
+        </p:txBody>
+      </p:sp>
+      <p:sp>
+        <p:nvSpPr>
+          <p:cNvPr id="5" name="Text 3">
+            <a:extLst>
+              <a:ext uri="{FF2B5EF4-FFF2-40B4-BE49-F238E27FC236}">
+                <a16:creationId xmlns:a16="http://schemas.microsoft.com/office/drawing/2014/main" id="{51CD2031-839F-70E4-4F1F-00AA904BA9BD}"/>
+              </a:ext>
+            </a:extLst>
+          </p:cNvPr>
+          <p:cNvSpPr/>
+          <p:nvPr/>
+        </p:nvSpPr>
+        <p:spPr>
+          <a:xfrm>
+            <a:off x="5698873" y="2412269"/>
+            <a:ext cx="6493128" cy="652584"/>
+          </a:xfrm>
+          <a:prstGeom prst="rect">
+            <a:avLst/>
+          </a:prstGeom>
+          <a:noFill/>
+          <a:ln/>
+        </p:spPr>
+        <p:txBody>
+          <a:bodyPr wrap="square" lIns="0" tIns="0" rIns="0" bIns="0" rtlCol="0" anchor="t"/>
+          <a:lstStyle/>
+          <a:p>
+            <a:pPr marL="0" indent="0" algn="l">
+              <a:lnSpc>
+                <a:spcPts val="2850"/>
+              </a:lnSpc>
+              <a:buNone/>
+            </a:pPr>
+            <a:r>
+              <a:rPr lang="en-US" sz="1750" dirty="0">
+                <a:solidFill>
+                  <a:srgbClr val="61615C"/>
+                </a:solidFill>
+                <a:latin typeface="Tomorrow" pitchFamily="34" charset="0"/>
+                <a:ea typeface="Tomorrow" pitchFamily="34" charset="-122"/>
+                <a:cs typeface="Tomorrow" pitchFamily="34" charset="-120"/>
+              </a:rPr>
+              <a:t>Created using UPPAAL to formally verify autonomous truck platooning behavior</a:t>
+            </a:r>
+            <a:endParaRPr lang="en-US" sz="1750" dirty="0"/>
+          </a:p>
+        </p:txBody>
+      </p:sp>
+      <p:sp>
+        <p:nvSpPr>
+          <p:cNvPr id="6" name="Shape 4">
+            <a:extLst>
+              <a:ext uri="{FF2B5EF4-FFF2-40B4-BE49-F238E27FC236}">
+                <a16:creationId xmlns:a16="http://schemas.microsoft.com/office/drawing/2014/main" id="{4D33835B-FBCE-E0C3-81A0-B95C2EFC0332}"/>
+              </a:ext>
+            </a:extLst>
+          </p:cNvPr>
+          <p:cNvSpPr/>
+          <p:nvPr/>
+        </p:nvSpPr>
+        <p:spPr>
+          <a:xfrm>
+            <a:off x="4961756" y="3591701"/>
+            <a:ext cx="485894" cy="458821"/>
+          </a:xfrm>
+          <a:prstGeom prst="roundRect">
+            <a:avLst>
+              <a:gd name="adj" fmla="val 6667"/>
+            </a:avLst>
+          </a:prstGeom>
+          <a:solidFill>
+            <a:srgbClr val="F0EAEA"/>
+          </a:solidFill>
+          <a:ln/>
+        </p:spPr>
+        <p:txBody>
+          <a:bodyPr/>
+          <a:lstStyle/>
+          <a:p>
+            <a:endParaRPr lang="zh-CN" altLang="en-US"/>
+          </a:p>
+        </p:txBody>
+      </p:sp>
+      <p:sp>
+        <p:nvSpPr>
+          <p:cNvPr id="7" name="Text 5">
+            <a:extLst>
+              <a:ext uri="{FF2B5EF4-FFF2-40B4-BE49-F238E27FC236}">
+                <a16:creationId xmlns:a16="http://schemas.microsoft.com/office/drawing/2014/main" id="{34E46091-D2CF-B21E-86CB-C91385251CE3}"/>
+              </a:ext>
+            </a:extLst>
+          </p:cNvPr>
+          <p:cNvSpPr/>
+          <p:nvPr/>
+        </p:nvSpPr>
+        <p:spPr>
+          <a:xfrm>
+            <a:off x="5698872" y="3669568"/>
+            <a:ext cx="2958327" cy="318584"/>
+          </a:xfrm>
+          <a:prstGeom prst="rect">
+            <a:avLst/>
+          </a:prstGeom>
+          <a:noFill/>
+          <a:ln/>
+        </p:spPr>
+        <p:txBody>
+          <a:bodyPr wrap="none" lIns="0" tIns="0" rIns="0" bIns="0" rtlCol="0" anchor="t"/>
+          <a:lstStyle/>
+          <a:p>
+            <a:pPr marL="0" indent="0" algn="l">
+              <a:lnSpc>
+                <a:spcPts val="2750"/>
+              </a:lnSpc>
+              <a:buNone/>
+            </a:pPr>
+            <a:r>
+              <a:rPr lang="en-US" sz="2200" b="1" i="1" dirty="0">
+                <a:solidFill>
+                  <a:schemeClr val="tx1">
+                    <a:lumMod val="95000"/>
+                    <a:lumOff val="5000"/>
+                  </a:schemeClr>
+                </a:solidFill>
+                <a:latin typeface="Tomorrow Semi Bold" pitchFamily="34" charset="0"/>
+                <a:ea typeface="Tomorrow Semi Bold" pitchFamily="34" charset="-122"/>
+                <a:cs typeface="Tomorrow Semi Bold" pitchFamily="34" charset="-120"/>
+              </a:rPr>
+              <a:t>Real-World Scenarios</a:t>
+            </a:r>
+            <a:endParaRPr lang="en-US" sz="2200" b="1" i="1" dirty="0">
+              <a:solidFill>
+                <a:schemeClr val="tx1">
+                  <a:lumMod val="95000"/>
+                  <a:lumOff val="5000"/>
+                </a:schemeClr>
+              </a:solidFill>
+            </a:endParaRPr>
+          </a:p>
+        </p:txBody>
+      </p:sp>
+      <p:sp>
+        <p:nvSpPr>
+          <p:cNvPr id="8" name="Text 6">
+            <a:extLst>
+              <a:ext uri="{FF2B5EF4-FFF2-40B4-BE49-F238E27FC236}">
+                <a16:creationId xmlns:a16="http://schemas.microsoft.com/office/drawing/2014/main" id="{E0121EAE-4E53-AD2C-EE14-B9AF4CFF28F7}"/>
+              </a:ext>
+            </a:extLst>
+          </p:cNvPr>
+          <p:cNvSpPr/>
+          <p:nvPr/>
+        </p:nvSpPr>
+        <p:spPr>
+          <a:xfrm>
+            <a:off x="5698873" y="4159987"/>
+            <a:ext cx="6493128" cy="652584"/>
+          </a:xfrm>
+          <a:prstGeom prst="rect">
+            <a:avLst/>
+          </a:prstGeom>
+          <a:noFill/>
+          <a:ln/>
+        </p:spPr>
+        <p:txBody>
+          <a:bodyPr wrap="square" lIns="0" tIns="0" rIns="0" bIns="0" rtlCol="0" anchor="t"/>
+          <a:lstStyle/>
+          <a:p>
+            <a:pPr marL="0" indent="0" algn="l">
+              <a:lnSpc>
+                <a:spcPts val="2850"/>
+              </a:lnSpc>
+              <a:buNone/>
+            </a:pPr>
+            <a:r>
+              <a:rPr lang="en-US" sz="1750" dirty="0">
+                <a:solidFill>
+                  <a:srgbClr val="61615C"/>
+                </a:solidFill>
+                <a:latin typeface="Tomorrow" pitchFamily="34" charset="0"/>
+                <a:ea typeface="Tomorrow" pitchFamily="34" charset="-122"/>
+                <a:cs typeface="Tomorrow" pitchFamily="34" charset="-120"/>
+              </a:rPr>
+              <a:t>Simulates trucks detecting cut-in cars and coordinating to avoid collisions</a:t>
+            </a:r>
+            <a:endParaRPr lang="en-US" sz="1750" dirty="0"/>
+          </a:p>
+        </p:txBody>
+      </p:sp>
+      <p:sp>
+        <p:nvSpPr>
+          <p:cNvPr id="9" name="Shape 7">
+            <a:extLst>
+              <a:ext uri="{FF2B5EF4-FFF2-40B4-BE49-F238E27FC236}">
+                <a16:creationId xmlns:a16="http://schemas.microsoft.com/office/drawing/2014/main" id="{95DC2CDF-CB88-61CB-53BF-0D011F01A68C}"/>
+              </a:ext>
+            </a:extLst>
+          </p:cNvPr>
+          <p:cNvSpPr/>
+          <p:nvPr/>
+        </p:nvSpPr>
+        <p:spPr>
+          <a:xfrm>
+            <a:off x="4961756" y="5339419"/>
+            <a:ext cx="485894" cy="458821"/>
+          </a:xfrm>
+          <a:prstGeom prst="roundRect">
+            <a:avLst>
+              <a:gd name="adj" fmla="val 6667"/>
+            </a:avLst>
+          </a:prstGeom>
+          <a:solidFill>
+            <a:srgbClr val="F0EAEA"/>
+          </a:solidFill>
+          <a:ln/>
+        </p:spPr>
+        <p:txBody>
+          <a:bodyPr/>
+          <a:lstStyle/>
+          <a:p>
+            <a:endParaRPr lang="zh-CN" altLang="en-US"/>
+          </a:p>
+        </p:txBody>
+      </p:sp>
+      <p:sp>
+        <p:nvSpPr>
+          <p:cNvPr id="10" name="Text 8">
+            <a:extLst>
+              <a:ext uri="{FF2B5EF4-FFF2-40B4-BE49-F238E27FC236}">
+                <a16:creationId xmlns:a16="http://schemas.microsoft.com/office/drawing/2014/main" id="{3D844B86-84FD-E93A-534F-C626189A217F}"/>
+              </a:ext>
+            </a:extLst>
+          </p:cNvPr>
+          <p:cNvSpPr/>
+          <p:nvPr/>
+        </p:nvSpPr>
+        <p:spPr>
+          <a:xfrm>
+            <a:off x="5698872" y="5417286"/>
+            <a:ext cx="2914340" cy="318584"/>
+          </a:xfrm>
+          <a:prstGeom prst="rect">
+            <a:avLst/>
+          </a:prstGeom>
+          <a:noFill/>
+          <a:ln/>
+        </p:spPr>
+        <p:txBody>
+          <a:bodyPr wrap="none" lIns="0" tIns="0" rIns="0" bIns="0" rtlCol="0" anchor="t"/>
+          <a:lstStyle/>
+          <a:p>
+            <a:pPr marL="0" indent="0" algn="l">
+              <a:lnSpc>
+                <a:spcPts val="2750"/>
+              </a:lnSpc>
+              <a:buNone/>
+            </a:pPr>
+            <a:r>
+              <a:rPr lang="en-US" sz="2200" b="1" i="1" dirty="0">
+                <a:solidFill>
+                  <a:schemeClr val="tx1">
+                    <a:lumMod val="95000"/>
+                    <a:lumOff val="5000"/>
+                  </a:schemeClr>
+                </a:solidFill>
+                <a:latin typeface="Tomorrow Semi Bold" pitchFamily="34" charset="0"/>
+                <a:ea typeface="Tomorrow Semi Bold" pitchFamily="34" charset="-122"/>
+                <a:cs typeface="Tomorrow Semi Bold" pitchFamily="34" charset="-120"/>
+              </a:rPr>
+              <a:t>Safe Joining Protocol</a:t>
+            </a:r>
+            <a:endParaRPr lang="en-US" sz="2200" b="1" i="1" dirty="0">
+              <a:solidFill>
+                <a:schemeClr val="tx1">
+                  <a:lumMod val="95000"/>
+                  <a:lumOff val="5000"/>
+                </a:schemeClr>
+              </a:solidFill>
+            </a:endParaRPr>
+          </a:p>
+        </p:txBody>
+      </p:sp>
+      <p:sp>
+        <p:nvSpPr>
+          <p:cNvPr id="11" name="Text 9">
+            <a:extLst>
+              <a:ext uri="{FF2B5EF4-FFF2-40B4-BE49-F238E27FC236}">
+                <a16:creationId xmlns:a16="http://schemas.microsoft.com/office/drawing/2014/main" id="{03CCC457-4C09-7391-A7C0-2C58E49A7DD9}"/>
+              </a:ext>
+            </a:extLst>
+          </p:cNvPr>
+          <p:cNvSpPr/>
+          <p:nvPr/>
+        </p:nvSpPr>
+        <p:spPr>
+          <a:xfrm>
+            <a:off x="5698873" y="5907705"/>
+            <a:ext cx="6493128" cy="652584"/>
+          </a:xfrm>
+          <a:prstGeom prst="rect">
+            <a:avLst/>
+          </a:prstGeom>
+          <a:noFill/>
+          <a:ln/>
+        </p:spPr>
+        <p:txBody>
+          <a:bodyPr wrap="square" lIns="0" tIns="0" rIns="0" bIns="0" rtlCol="0" anchor="t"/>
+          <a:lstStyle/>
+          <a:p>
+            <a:pPr marL="0" indent="0" algn="l">
+              <a:lnSpc>
+                <a:spcPts val="2850"/>
+              </a:lnSpc>
+              <a:buNone/>
+            </a:pPr>
+            <a:r>
+              <a:rPr lang="en-US" sz="1750" dirty="0">
+                <a:solidFill>
+                  <a:srgbClr val="61615C"/>
+                </a:solidFill>
+                <a:latin typeface="Tomorrow" pitchFamily="34" charset="0"/>
+                <a:ea typeface="Tomorrow" pitchFamily="34" charset="-122"/>
+                <a:cs typeface="Tomorrow" pitchFamily="34" charset="-120"/>
+              </a:rPr>
+              <a:t>Enables new trucks to safely join an existing platoon through formal verification</a:t>
+            </a:r>
+            <a:endParaRPr lang="en-US" sz="1750" dirty="0"/>
+          </a:p>
+        </p:txBody>
+      </p:sp>
+      <p:pic>
+        <p:nvPicPr>
+          <p:cNvPr id="2050" name="Picture 2" descr="Identificación Y Verificación Como Parte De La Debida Diligencia Adecuada  De Un Cliente">
+            <a:extLst>
+              <a:ext uri="{FF2B5EF4-FFF2-40B4-BE49-F238E27FC236}">
+                <a16:creationId xmlns:a16="http://schemas.microsoft.com/office/drawing/2014/main" id="{7E0C36F3-CE5E-0B4E-1DC1-D8609DFECFE8}"/>
+              </a:ext>
+            </a:extLst>
+          </p:cNvPr>
+          <p:cNvPicPr>
+            <a:picLocks noChangeAspect="1" noChangeArrowheads="1"/>
+          </p:cNvPicPr>
+          <p:nvPr/>
+        </p:nvPicPr>
+        <p:blipFill>
+          <a:blip r:embed="rId2">
+            <a:extLst>
+              <a:ext uri="{28A0092B-C50C-407E-A947-70E740481C1C}">
+                <a14:useLocalDpi xmlns:a14="http://schemas.microsoft.com/office/drawing/2010/main" val="0"/>
+              </a:ext>
+            </a:extLst>
+          </a:blip>
+          <a:srcRect/>
+          <a:stretch>
+            <a:fillRect/>
+          </a:stretch>
+        </p:blipFill>
+        <p:spPr bwMode="auto">
+          <a:xfrm>
+            <a:off x="0" y="1"/>
+            <a:ext cx="4805916" cy="6858000"/>
+          </a:xfrm>
+          <a:prstGeom prst="rect">
+            <a:avLst/>
+          </a:prstGeom>
+          <a:noFill/>
+          <a:extLst>
+            <a:ext uri="{909E8E84-426E-40DD-AFC4-6F175D3DCCD1}">
+              <a14:hiddenFill xmlns:a14="http://schemas.microsoft.com/office/drawing/2010/main">
+                <a:solidFill>
+                  <a:srgbClr val="FFFFFF"/>
+                </a:solidFill>
+              </a14:hiddenFill>
+            </a:ext>
+          </a:extLst>
+        </p:spPr>
+      </p:pic>
+    </p:spTree>
+    <p:extLst>
+      <p:ext uri="{BB962C8B-B14F-4D97-AF65-F5344CB8AC3E}">
+        <p14:creationId xmlns:p14="http://schemas.microsoft.com/office/powerpoint/2010/main" val="296643509"/>
+      </p:ext>
+    </p:extLst>
+  </p:cSld>
+  <p:clrMapOvr>
+    <a:masterClrMapping/>
+  </p:clrMapOvr>
+</p:sld>
+</file>
+
+<file path=ppt/slides/slide5.xml><?xml version="1.0" encoding="utf-8"?>
+<p:sld xmlns:a="http://schemas.openxmlformats.org/drawingml/2006/main" xmlns:r="http://schemas.openxmlformats.org/officeDocument/2006/relationships" xmlns:p="http://schemas.openxmlformats.org/presentationml/2006/main">
+  <p:cSld>
+    <p:spTree>
+      <p:nvGrpSpPr>
+        <p:cNvPr id="1" name=""/>
+        <p:cNvGrpSpPr/>
+        <p:nvPr/>
+      </p:nvGrpSpPr>
+      <p:grpSpPr>
+        <a:xfrm>
+          <a:off x="0" y="0"/>
+          <a:ext cx="0" cy="0"/>
+          <a:chOff x="0" y="0"/>
+          <a:chExt cx="0" cy="0"/>
+        </a:xfrm>
+      </p:grpSpPr>
+      <p:sp>
+        <p:nvSpPr>
+          <p:cNvPr id="2" name="Text 0">
+            <a:extLst>
+              <a:ext uri="{FF2B5EF4-FFF2-40B4-BE49-F238E27FC236}">
                 <a16:creationId xmlns:a16="http://schemas.microsoft.com/office/drawing/2014/main" id="{541504A1-1912-D5DA-515F-745A6B0EE6F1}"/>
               </a:ext>
             </a:extLst>
@@ -6682,7 +6953,7 @@
 </p:sld>
 </file>
 
-<file path=ppt/slides/slide5.xml><?xml version="1.0" encoding="utf-8"?>
+<file path=ppt/slides/slide6.xml><?xml version="1.0" encoding="utf-8"?>
 <p:sld xmlns:a="http://schemas.openxmlformats.org/drawingml/2006/main" xmlns:r="http://schemas.openxmlformats.org/officeDocument/2006/relationships" xmlns:p="http://schemas.openxmlformats.org/presentationml/2006/main">
   <p:cSld>
     <p:spTree>
@@ -7859,66 +8130,6 @@
     <p:extLst>
       <p:ext uri="{BB962C8B-B14F-4D97-AF65-F5344CB8AC3E}">
         <p14:creationId xmlns:p14="http://schemas.microsoft.com/office/powerpoint/2010/main" val="2192033188"/>
-      </p:ext>
-    </p:extLst>
-  </p:cSld>
-  <p:clrMapOvr>
-    <a:masterClrMapping/>
-  </p:clrMapOvr>
-</p:sld>
-</file>
-
-<file path=ppt/slides/slide6.xml><?xml version="1.0" encoding="utf-8"?>
-<p:sld xmlns:a="http://schemas.openxmlformats.org/drawingml/2006/main" xmlns:r="http://schemas.openxmlformats.org/officeDocument/2006/relationships" xmlns:p="http://schemas.openxmlformats.org/presentationml/2006/main">
-  <p:cSld>
-    <p:spTree>
-      <p:nvGrpSpPr>
-        <p:cNvPr id="1" name=""/>
-        <p:cNvGrpSpPr/>
-        <p:nvPr/>
-      </p:nvGrpSpPr>
-      <p:grpSpPr>
-        <a:xfrm>
-          <a:off x="0" y="0"/>
-          <a:ext cx="0" cy="0"/>
-          <a:chOff x="0" y="0"/>
-          <a:chExt cx="0" cy="0"/>
-        </a:xfrm>
-      </p:grpSpPr>
-      <p:pic>
-        <p:nvPicPr>
-          <p:cNvPr id="2" name="Picture 1">
-            <a:extLst>
-              <a:ext uri="{FF2B5EF4-FFF2-40B4-BE49-F238E27FC236}">
-                <a16:creationId xmlns:a16="http://schemas.microsoft.com/office/drawing/2014/main" id="{28AC5B99-A3A2-BB01-3F39-E3CA65EB6422}"/>
-              </a:ext>
-            </a:extLst>
-          </p:cNvPr>
-          <p:cNvPicPr>
-            <a:picLocks noChangeAspect="1"/>
-          </p:cNvPicPr>
-          <p:nvPr/>
-        </p:nvPicPr>
-        <p:blipFill>
-          <a:blip r:embed="rId2"/>
-          <a:stretch>
-            <a:fillRect/>
-          </a:stretch>
-        </p:blipFill>
-        <p:spPr>
-          <a:xfrm>
-            <a:off x="0" y="1622110"/>
-            <a:ext cx="12192000" cy="2656840"/>
-          </a:xfrm>
-          <a:prstGeom prst="rect">
-            <a:avLst/>
-          </a:prstGeom>
-        </p:spPr>
-      </p:pic>
-    </p:spTree>
-    <p:extLst>
-      <p:ext uri="{BB962C8B-B14F-4D97-AF65-F5344CB8AC3E}">
-        <p14:creationId xmlns:p14="http://schemas.microsoft.com/office/powerpoint/2010/main" val="4120009200"/>
       </p:ext>
     </p:extLst>
   </p:cSld>
@@ -8136,7 +8347,7 @@
                 <a:ea typeface="Tomorrow Semi Bold" pitchFamily="34" charset="-122"/>
                 <a:cs typeface="Tomorrow Semi Bold" pitchFamily="34" charset="-120"/>
               </a:rPr>
-              <a:t>Dataset Preprocessing</a:t>
+              <a:t>Dataset Preparation</a:t>
             </a:r>
             <a:endParaRPr lang="en-US" sz="4450" b="1" i="1" dirty="0"/>
           </a:p>
@@ -8204,7 +8415,7 @@
         </p:nvSpPr>
         <p:spPr>
           <a:xfrm>
-            <a:off x="2483536" y="2688222"/>
+            <a:off x="2483536" y="3047450"/>
             <a:ext cx="6244709" cy="725805"/>
           </a:xfrm>
           <a:prstGeom prst="rect">
@@ -8353,7 +8564,7 @@
                 <a:ea typeface="Tomorrow" pitchFamily="34" charset="-122"/>
                 <a:cs typeface="Tomorrow" pitchFamily="34" charset="-120"/>
               </a:rPr>
-              <a:t>Saved processed data into X_features1.npy and Y_lebels1.npy</a:t>
+              <a:t>Saved processed data into X_features1.npy and Y_lebels1.</a:t>
             </a:r>
             <a:endParaRPr lang="en-US" sz="1750" dirty="0"/>
           </a:p>
@@ -8373,7 +8584,7 @@
         </p:nvSpPr>
         <p:spPr>
           <a:xfrm>
-            <a:off x="2483536" y="4740622"/>
+            <a:off x="2483536" y="2650565"/>
             <a:ext cx="6244709" cy="362903"/>
           </a:xfrm>
           <a:prstGeom prst="rect">
